--- a/assets/pptx/catalog-231.pptx
+++ b/assets/pptx/catalog-231.pptx
@@ -3253,7 +3253,7 @@
                 <a:ea typeface="Ebrima"/>
                 <a:cs typeface="Ebrima"/>
               </a:rPr>
-              <a:t>ቅዱስ መንፈስህን (2x)</a:t>
+              <a:t>ቅዱስ መንፈስህን 2x</a:t>
             </a:r>
           </a:p>
           <a:p>
@@ -3271,7 +3271,7 @@
                 <a:ea typeface="Ebrima"/>
                 <a:cs typeface="Ebrima"/>
               </a:rPr>
-              <a:t>ከእኔ ላይ (2x)</a:t>
+              <a:t>ከእኔ ላይ 2x</a:t>
             </a:r>
           </a:p>
           <a:p>
@@ -3289,7 +3289,7 @@
                 <a:ea typeface="Ebrima"/>
                 <a:cs typeface="Ebrima"/>
               </a:rPr>
-              <a:t>ኧረ አትውሰድብኝ (2x)</a:t>
+              <a:t>ኧረ አትውሰድብኝ 2x</a:t>
             </a:r>
           </a:p>
         </p:txBody>
@@ -3428,7 +3428,7 @@
                 <a:ea typeface="Ebrima"/>
                 <a:cs typeface="Ebrima"/>
               </a:rPr>
-              <a:t>ምሥጋናን ምሥጋና ምሥጋናን እሰዋለሁ (2x)</a:t>
+              <a:t>ምሥጋናን ምሥጋና ምሥጋናን እሰዋለሁ 2x</a:t>
             </a:r>
           </a:p>
         </p:txBody>
@@ -3531,7 +3531,7 @@
                 <a:ea typeface="Ebrima"/>
                 <a:cs typeface="Ebrima"/>
               </a:rPr>
-              <a:t>ለሆንከው ገናና (2x)</a:t>
+              <a:t>ለሆንከው ገናና 2x</a:t>
             </a:r>
           </a:p>
         </p:txBody>
@@ -3791,7 +3791,7 @@
                 <a:ea typeface="Ebrima"/>
                 <a:cs typeface="Ebrima"/>
               </a:rPr>
-              <a:t>ምህረቱ ለዘለዓለም ነው (4x) ምህረቱ ለዘለዓለም ነው (4x)</a:t>
+              <a:t>ምህረቱ ለዘለዓለም ነው 4x ምህረቱ ለዘለዓለም ነው 4x</a:t>
             </a:r>
           </a:p>
           <a:p>
@@ -3809,7 +3809,7 @@
                 <a:ea typeface="Ebrima"/>
                 <a:cs typeface="Ebrima"/>
               </a:rPr>
-              <a:t>ምህረቱ ለዘለዓለም ነው (4x) ምህረቱ ለዘለዓለም ነው (4x)</a:t>
+              <a:t>ምህረቱ ለዘለዓለም ነው 4x ምህረቱ ለዘለዓለም ነው 4x</a:t>
             </a:r>
           </a:p>
           <a:p>
@@ -3827,7 +3827,7 @@
                 <a:ea typeface="Ebrima"/>
                 <a:cs typeface="Ebrima"/>
               </a:rPr>
-              <a:t>ምህረቱ ለዘለዓለም ነው (4x) ምህረቱ ለዘለዓለም ነው (4x)</a:t>
+              <a:t>ምህረቱ ለዘለዓለም ነው 4x ምህረቱ ለዘለዓለም ነው 4x</a:t>
             </a:r>
           </a:p>
           <a:p>
@@ -3845,7 +3845,7 @@
                 <a:ea typeface="Ebrima"/>
                 <a:cs typeface="Ebrima"/>
               </a:rPr>
-              <a:t>ምህረቱ ለዘለዓለም ነው (4x) ምህረቱ ለዘለዓለም ነው (4x)</a:t>
+              <a:t>ምህረቱ ለዘለዓለም ነው 4x ምህረቱ ለዘለዓለም ነው 4x</a:t>
             </a:r>
           </a:p>
           <a:p>
@@ -3863,7 +3863,7 @@
                 <a:ea typeface="Ebrima"/>
                 <a:cs typeface="Ebrima"/>
               </a:rPr>
-              <a:t>ምህረቱ ለዘለዓለም ነው (4x) ምህረቱ ለዘለዓለም ነው (4x)</a:t>
+              <a:t>ምህረቱ ለዘለዓለም ነው 4x ምህረቱ ለዘለዓለም ነው 4x</a:t>
             </a:r>
           </a:p>
         </p:txBody>
@@ -4447,7 +4447,7 @@
                 <a:ea typeface="Ebrima"/>
                 <a:cs typeface="Ebrima"/>
               </a:rPr>
-              <a:t>መተላለፌን ደምስሳት (4x)</a:t>
+              <a:t>መተላለፌን ደምስሳት 4x</a:t>
             </a:r>
           </a:p>
         </p:txBody>
@@ -4604,7 +4604,7 @@
                 <a:ea typeface="Ebrima"/>
                 <a:cs typeface="Ebrima"/>
               </a:rPr>
-              <a:t>እጠበኝ ከበረዶ ይልቅ ነጭ እሆናለሁ (2x)</a:t>
+              <a:t>እጠበኝ ከበረዶ ይልቅ ነጭ እሆናለሁ 2x</a:t>
             </a:r>
           </a:p>
         </p:txBody>
@@ -4707,7 +4707,7 @@
                 <a:ea typeface="Ebrima"/>
                 <a:cs typeface="Ebrima"/>
               </a:rPr>
-              <a:t>መተላለፌን ደምስሳት (4x)</a:t>
+              <a:t>መተላለፌን ደምስሳት 4x</a:t>
             </a:r>
           </a:p>
         </p:txBody>
@@ -4864,7 +4864,7 @@
                 <a:ea typeface="Ebrima"/>
                 <a:cs typeface="Ebrima"/>
               </a:rPr>
-              <a:t>እጠበኝ ከበረዶ ይልቅ ነጭ እሆናለሁ (2x)</a:t>
+              <a:t>እጠበኝ ከበረዶ ይልቅ ነጭ እሆናለሁ 2x</a:t>
             </a:r>
           </a:p>
         </p:txBody>
@@ -4967,7 +4967,7 @@
                 <a:ea typeface="Ebrima"/>
                 <a:cs typeface="Ebrima"/>
               </a:rPr>
-              <a:t>መተላለፌን ደምስሳት (2x)</a:t>
+              <a:t>መተላለፌን ደምስሳት 2x</a:t>
             </a:r>
           </a:p>
         </p:txBody>
@@ -5101,7 +5101,7 @@
                 <a:ea typeface="Ebrima"/>
                 <a:cs typeface="Ebrima"/>
               </a:rPr>
-              <a:t>ቅዱስ መንፈስህን (2x)</a:t>
+              <a:t>ቅዱስ መንፈስህን 2x</a:t>
             </a:r>
           </a:p>
           <a:p>
@@ -5119,7 +5119,7 @@
                 <a:ea typeface="Ebrima"/>
                 <a:cs typeface="Ebrima"/>
               </a:rPr>
-              <a:t>ከእኔ ላይ (2x)</a:t>
+              <a:t>ከእኔ ላይ 2x</a:t>
             </a:r>
           </a:p>
           <a:p>
@@ -5137,7 +5137,7 @@
                 <a:ea typeface="Ebrima"/>
                 <a:cs typeface="Ebrima"/>
               </a:rPr>
-              <a:t>ኧረ አትውሰድብኝ (2x)</a:t>
+              <a:t>ኧረ አትውሰድብኝ 2x</a:t>
             </a:r>
           </a:p>
         </p:txBody>
